--- a/modules/01-intro-lab-methodology/slides.pptx
+++ b/modules/01-intro-lab-methodology/slides.pptx
@@ -3477,7 +3477,7 @@
             </a:r>
             <a:r>
               <a:rPr/>
-              <a:t> — VMware / VirtualBox (חינמי)</a:t>
+              <a:t> — VirtualBox / VMware (חינמי)</a:t>
             </a:r>
           </a:p>
           <a:p>
